--- a/assets/powerpoints/module-sante/E2-je-retiens-des-mots.pptx
+++ b/assets/powerpoints/module-sante/E2-je-retiens-des-mots.pptx
@@ -4290,7 +4290,7 @@
             <a:r>
               <a:rPr sz="1300" b="1" i="0" spc="156">
                 <a:solidFill>
-                  <a:srgbClr val="166534"/>
+                  <a:srgbClr val="A5335F"/>
                 </a:solidFill>
                 <a:latin typeface="Verdana"/>
               </a:rPr>
@@ -4630,7 +4630,7 @@
             <a:r>
               <a:rPr sz="1300" b="1" i="0" spc="156">
                 <a:solidFill>
-                  <a:srgbClr val="166534"/>
+                  <a:srgbClr val="A5335F"/>
                 </a:solidFill>
                 <a:latin typeface="Verdana"/>
               </a:rPr>
@@ -4754,7 +4754,7 @@
             <a:r>
               <a:rPr sz="2400" b="1" i="0">
                 <a:solidFill>
-                  <a:srgbClr val="166534"/>
+                  <a:srgbClr val="A5335F"/>
                 </a:solidFill>
                 <a:latin typeface="Verdana"/>
               </a:rPr>
@@ -4878,7 +4878,7 @@
             <a:r>
               <a:rPr sz="2400" b="1" i="0">
                 <a:solidFill>
-                  <a:srgbClr val="166534"/>
+                  <a:srgbClr val="A5335F"/>
                 </a:solidFill>
                 <a:latin typeface="Verdana"/>
               </a:rPr>
@@ -5002,7 +5002,7 @@
             <a:r>
               <a:rPr sz="2400" b="1" i="0">
                 <a:solidFill>
-                  <a:srgbClr val="166534"/>
+                  <a:srgbClr val="A5335F"/>
                 </a:solidFill>
                 <a:latin typeface="Verdana"/>
               </a:rPr>
@@ -5126,7 +5126,7 @@
             <a:r>
               <a:rPr sz="2400" b="1" i="0">
                 <a:solidFill>
-                  <a:srgbClr val="166534"/>
+                  <a:srgbClr val="A5335F"/>
                 </a:solidFill>
                 <a:latin typeface="Verdana"/>
               </a:rPr>
@@ -5805,7 +5805,7 @@
             <a:r>
               <a:rPr sz="1300" b="1" i="0" spc="156">
                 <a:solidFill>
-                  <a:srgbClr val="166534"/>
+                  <a:srgbClr val="A5335F"/>
                 </a:solidFill>
                 <a:latin typeface="Verdana"/>
               </a:rPr>
@@ -5916,7 +5916,7 @@
             </a:avLst>
           </a:prstGeom>
           <a:solidFill>
-            <a:srgbClr val="E3F1E7"/>
+            <a:srgbClr val="FCE9F0"/>
           </a:solidFill>
           <a:ln>
             <a:noFill/>
@@ -5973,7 +5973,7 @@
             <a:r>
               <a:rPr sz="1500" b="1" i="0">
                 <a:solidFill>
-                  <a:srgbClr val="166534"/>
+                  <a:srgbClr val="A5335F"/>
                 </a:solidFill>
                 <a:latin typeface="Verdana"/>
               </a:rPr>
@@ -6084,7 +6084,7 @@
             </a:avLst>
           </a:prstGeom>
           <a:solidFill>
-            <a:srgbClr val="E3F1E7"/>
+            <a:srgbClr val="FCE9F0"/>
           </a:solidFill>
           <a:ln>
             <a:noFill/>
@@ -6141,7 +6141,7 @@
             <a:r>
               <a:rPr sz="1500" b="1" i="0">
                 <a:solidFill>
-                  <a:srgbClr val="166534"/>
+                  <a:srgbClr val="A5335F"/>
                 </a:solidFill>
                 <a:latin typeface="Verdana"/>
               </a:rPr>
@@ -6252,7 +6252,7 @@
             </a:avLst>
           </a:prstGeom>
           <a:solidFill>
-            <a:srgbClr val="E3F1E7"/>
+            <a:srgbClr val="FCE9F0"/>
           </a:solidFill>
           <a:ln>
             <a:noFill/>
@@ -6309,7 +6309,7 @@
             <a:r>
               <a:rPr sz="1500" b="1" i="0">
                 <a:solidFill>
-                  <a:srgbClr val="166534"/>
+                  <a:srgbClr val="A5335F"/>
                 </a:solidFill>
                 <a:latin typeface="Verdana"/>
               </a:rPr>
@@ -6420,7 +6420,7 @@
             </a:avLst>
           </a:prstGeom>
           <a:solidFill>
-            <a:srgbClr val="E3F1E7"/>
+            <a:srgbClr val="FCE9F0"/>
           </a:solidFill>
           <a:ln>
             <a:noFill/>
@@ -6477,7 +6477,7 @@
             <a:r>
               <a:rPr sz="1500" b="1" i="0">
                 <a:solidFill>
-                  <a:srgbClr val="166534"/>
+                  <a:srgbClr val="A5335F"/>
                 </a:solidFill>
                 <a:latin typeface="Verdana"/>
               </a:rPr>
@@ -6693,7 +6693,7 @@
             <a:r>
               <a:rPr sz="1300" b="1" i="0" spc="156">
                 <a:solidFill>
-                  <a:srgbClr val="166534"/>
+                  <a:srgbClr val="A5335F"/>
                 </a:solidFill>
                 <a:latin typeface="Verdana"/>
               </a:rPr>
@@ -6895,7 +6895,7 @@
             <a:r>
               <a:rPr sz="1800" b="1" i="0">
                 <a:solidFill>
-                  <a:srgbClr val="166534"/>
+                  <a:srgbClr val="A5335F"/>
                 </a:solidFill>
                 <a:latin typeface="Verdana"/>
               </a:rPr>
@@ -7015,7 +7015,7 @@
             <a:r>
               <a:rPr sz="1800" b="1" i="0">
                 <a:solidFill>
-                  <a:srgbClr val="166534"/>
+                  <a:srgbClr val="A5335F"/>
                 </a:solidFill>
                 <a:latin typeface="Verdana"/>
               </a:rPr>
@@ -7135,7 +7135,7 @@
             <a:r>
               <a:rPr sz="1800" b="1" i="0">
                 <a:solidFill>
-                  <a:srgbClr val="166534"/>
+                  <a:srgbClr val="A5335F"/>
                 </a:solidFill>
                 <a:latin typeface="Verdana"/>
               </a:rPr>
@@ -7255,7 +7255,7 @@
             <a:r>
               <a:rPr sz="1800" b="1" i="0">
                 <a:solidFill>
-                  <a:srgbClr val="166534"/>
+                  <a:srgbClr val="A5335F"/>
                 </a:solidFill>
                 <a:latin typeface="Verdana"/>
               </a:rPr>
@@ -7471,7 +7471,7 @@
             <a:r>
               <a:rPr sz="1300" b="1" i="0" spc="156">
                 <a:solidFill>
-                  <a:srgbClr val="166534"/>
+                  <a:srgbClr val="A5335F"/>
                 </a:solidFill>
                 <a:latin typeface="Verdana"/>
               </a:rPr>
@@ -8411,7 +8411,7 @@
             <a:r>
               <a:rPr sz="1300" b="1" i="0" spc="156">
                 <a:solidFill>
-                  <a:srgbClr val="166534"/>
+                  <a:srgbClr val="A5335F"/>
                 </a:solidFill>
                 <a:latin typeface="Verdana"/>
               </a:rPr>
@@ -9351,7 +9351,7 @@
             <a:r>
               <a:rPr sz="1300" b="1" i="0" spc="156">
                 <a:solidFill>
-                  <a:srgbClr val="166534"/>
+                  <a:srgbClr val="A5335F"/>
                 </a:solidFill>
                 <a:latin typeface="Verdana"/>
               </a:rPr>
@@ -9501,7 +9501,7 @@
             </a:avLst>
           </a:prstGeom>
           <a:solidFill>
-            <a:srgbClr val="E3F1E7"/>
+            <a:srgbClr val="FCE9F0"/>
           </a:solidFill>
           <a:ln>
             <a:noFill/>
@@ -9558,7 +9558,7 @@
             <a:r>
               <a:rPr sz="1500" b="1" i="0">
                 <a:solidFill>
-                  <a:srgbClr val="166534"/>
+                  <a:srgbClr val="A5335F"/>
                 </a:solidFill>
                 <a:latin typeface="Verdana"/>
               </a:rPr>
@@ -9669,7 +9669,7 @@
             </a:avLst>
           </a:prstGeom>
           <a:solidFill>
-            <a:srgbClr val="E3F1E7"/>
+            <a:srgbClr val="FCE9F0"/>
           </a:solidFill>
           <a:ln>
             <a:noFill/>
@@ -9726,7 +9726,7 @@
             <a:r>
               <a:rPr sz="1500" b="1" i="0">
                 <a:solidFill>
-                  <a:srgbClr val="166534"/>
+                  <a:srgbClr val="A5335F"/>
                 </a:solidFill>
                 <a:latin typeface="Verdana"/>
               </a:rPr>
@@ -9837,7 +9837,7 @@
             </a:avLst>
           </a:prstGeom>
           <a:solidFill>
-            <a:srgbClr val="E3F1E7"/>
+            <a:srgbClr val="FCE9F0"/>
           </a:solidFill>
           <a:ln>
             <a:noFill/>
@@ -9894,7 +9894,7 @@
             <a:r>
               <a:rPr sz="1500" b="1" i="0">
                 <a:solidFill>
-                  <a:srgbClr val="166534"/>
+                  <a:srgbClr val="A5335F"/>
                 </a:solidFill>
                 <a:latin typeface="Verdana"/>
               </a:rPr>
@@ -10005,7 +10005,7 @@
             </a:avLst>
           </a:prstGeom>
           <a:solidFill>
-            <a:srgbClr val="E3F1E7"/>
+            <a:srgbClr val="FCE9F0"/>
           </a:solidFill>
           <a:ln>
             <a:noFill/>
@@ -10062,7 +10062,7 @@
             <a:r>
               <a:rPr sz="1500" b="1" i="0">
                 <a:solidFill>
-                  <a:srgbClr val="166534"/>
+                  <a:srgbClr val="A5335F"/>
                 </a:solidFill>
                 <a:latin typeface="Verdana"/>
               </a:rPr>
@@ -10278,7 +10278,7 @@
             <a:r>
               <a:rPr sz="1300" b="1" i="0" spc="156">
                 <a:solidFill>
-                  <a:srgbClr val="166534"/>
+                  <a:srgbClr val="A5335F"/>
                 </a:solidFill>
                 <a:latin typeface="Verdana"/>
               </a:rPr>
@@ -10428,7 +10428,7 @@
             </a:avLst>
           </a:prstGeom>
           <a:solidFill>
-            <a:srgbClr val="E3F1E7"/>
+            <a:srgbClr val="FCE9F0"/>
           </a:solidFill>
           <a:ln>
             <a:noFill/>
@@ -10485,7 +10485,7 @@
             <a:r>
               <a:rPr sz="1500" b="1" i="0">
                 <a:solidFill>
-                  <a:srgbClr val="166534"/>
+                  <a:srgbClr val="A5335F"/>
                 </a:solidFill>
                 <a:latin typeface="Verdana"/>
               </a:rPr>
@@ -10596,7 +10596,7 @@
             </a:avLst>
           </a:prstGeom>
           <a:solidFill>
-            <a:srgbClr val="E3F1E7"/>
+            <a:srgbClr val="FCE9F0"/>
           </a:solidFill>
           <a:ln>
             <a:noFill/>
@@ -10653,7 +10653,7 @@
             <a:r>
               <a:rPr sz="1500" b="1" i="0">
                 <a:solidFill>
-                  <a:srgbClr val="166534"/>
+                  <a:srgbClr val="A5335F"/>
                 </a:solidFill>
                 <a:latin typeface="Verdana"/>
               </a:rPr>
@@ -10764,7 +10764,7 @@
             </a:avLst>
           </a:prstGeom>
           <a:solidFill>
-            <a:srgbClr val="E3F1E7"/>
+            <a:srgbClr val="FCE9F0"/>
           </a:solidFill>
           <a:ln>
             <a:noFill/>
@@ -10821,7 +10821,7 @@
             <a:r>
               <a:rPr sz="1500" b="1" i="0">
                 <a:solidFill>
-                  <a:srgbClr val="166534"/>
+                  <a:srgbClr val="A5335F"/>
                 </a:solidFill>
                 <a:latin typeface="Verdana"/>
               </a:rPr>
@@ -10932,7 +10932,7 @@
             </a:avLst>
           </a:prstGeom>
           <a:solidFill>
-            <a:srgbClr val="E3F1E7"/>
+            <a:srgbClr val="FCE9F0"/>
           </a:solidFill>
           <a:ln>
             <a:noFill/>
@@ -10989,7 +10989,7 @@
             <a:r>
               <a:rPr sz="1500" b="1" i="0">
                 <a:solidFill>
-                  <a:srgbClr val="166534"/>
+                  <a:srgbClr val="A5335F"/>
                 </a:solidFill>
                 <a:latin typeface="Verdana"/>
               </a:rPr>
@@ -11100,7 +11100,7 @@
             </a:avLst>
           </a:prstGeom>
           <a:solidFill>
-            <a:srgbClr val="E3F1E7"/>
+            <a:srgbClr val="FCE9F0"/>
           </a:solidFill>
           <a:ln>
             <a:noFill/>
@@ -11157,7 +11157,7 @@
             <a:r>
               <a:rPr sz="1500" b="1" i="0">
                 <a:solidFill>
-                  <a:srgbClr val="166534"/>
+                  <a:srgbClr val="A5335F"/>
                 </a:solidFill>
                 <a:latin typeface="Verdana"/>
               </a:rPr>
@@ -11373,7 +11373,7 @@
             <a:r>
               <a:rPr sz="1300" b="1" i="0" spc="156">
                 <a:solidFill>
-                  <a:srgbClr val="166534"/>
+                  <a:srgbClr val="A5335F"/>
                 </a:solidFill>
                 <a:latin typeface="Verdana"/>
               </a:rPr>
@@ -11523,7 +11523,7 @@
             </a:avLst>
           </a:prstGeom>
           <a:solidFill>
-            <a:srgbClr val="E3F1E7"/>
+            <a:srgbClr val="FCE9F0"/>
           </a:solidFill>
           <a:ln>
             <a:noFill/>
@@ -11580,7 +11580,7 @@
             <a:r>
               <a:rPr sz="1500" b="1" i="0">
                 <a:solidFill>
-                  <a:srgbClr val="166534"/>
+                  <a:srgbClr val="A5335F"/>
                 </a:solidFill>
                 <a:latin typeface="Verdana"/>
               </a:rPr>
@@ -11700,7 +11700,7 @@
             </a:avLst>
           </a:prstGeom>
           <a:solidFill>
-            <a:srgbClr val="E3F1E7"/>
+            <a:srgbClr val="FCE9F0"/>
           </a:solidFill>
           <a:ln>
             <a:noFill/>
@@ -11757,7 +11757,7 @@
             <a:r>
               <a:rPr sz="1500" b="1" i="0">
                 <a:solidFill>
-                  <a:srgbClr val="166534"/>
+                  <a:srgbClr val="A5335F"/>
                 </a:solidFill>
                 <a:latin typeface="Verdana"/>
               </a:rPr>
@@ -11877,7 +11877,7 @@
             </a:avLst>
           </a:prstGeom>
           <a:solidFill>
-            <a:srgbClr val="E3F1E7"/>
+            <a:srgbClr val="FCE9F0"/>
           </a:solidFill>
           <a:ln>
             <a:noFill/>
@@ -11934,7 +11934,7 @@
             <a:r>
               <a:rPr sz="1500" b="1" i="0">
                 <a:solidFill>
-                  <a:srgbClr val="166534"/>
+                  <a:srgbClr val="A5335F"/>
                 </a:solidFill>
                 <a:latin typeface="Verdana"/>
               </a:rPr>
@@ -12054,7 +12054,7 @@
             </a:avLst>
           </a:prstGeom>
           <a:solidFill>
-            <a:srgbClr val="E3F1E7"/>
+            <a:srgbClr val="FCE9F0"/>
           </a:solidFill>
           <a:ln>
             <a:noFill/>
@@ -12111,7 +12111,7 @@
             <a:r>
               <a:rPr sz="1500" b="1" i="0">
                 <a:solidFill>
-                  <a:srgbClr val="166534"/>
+                  <a:srgbClr val="A5335F"/>
                 </a:solidFill>
                 <a:latin typeface="Verdana"/>
               </a:rPr>
@@ -12231,7 +12231,7 @@
             </a:avLst>
           </a:prstGeom>
           <a:solidFill>
-            <a:srgbClr val="E3F1E7"/>
+            <a:srgbClr val="FCE9F0"/>
           </a:solidFill>
           <a:ln>
             <a:noFill/>
@@ -12288,7 +12288,7 @@
             <a:r>
               <a:rPr sz="1500" b="1" i="0">
                 <a:solidFill>
-                  <a:srgbClr val="166534"/>
+                  <a:srgbClr val="A5335F"/>
                 </a:solidFill>
                 <a:latin typeface="Verdana"/>
               </a:rPr>
@@ -12513,7 +12513,7 @@
             <a:r>
               <a:rPr sz="1300" b="1" i="0" spc="156">
                 <a:solidFill>
-                  <a:srgbClr val="166534"/>
+                  <a:srgbClr val="A5335F"/>
                 </a:solidFill>
                 <a:latin typeface="Verdana"/>
               </a:rPr>
@@ -12663,7 +12663,7 @@
             </a:avLst>
           </a:prstGeom>
           <a:solidFill>
-            <a:srgbClr val="E3F1E7"/>
+            <a:srgbClr val="FCE9F0"/>
           </a:solidFill>
           <a:ln>
             <a:noFill/>
@@ -12720,7 +12720,7 @@
             <a:r>
               <a:rPr sz="1500" b="1" i="0">
                 <a:solidFill>
-                  <a:srgbClr val="166534"/>
+                  <a:srgbClr val="A5335F"/>
                 </a:solidFill>
                 <a:latin typeface="Verdana"/>
               </a:rPr>
@@ -12831,7 +12831,7 @@
             </a:avLst>
           </a:prstGeom>
           <a:solidFill>
-            <a:srgbClr val="E3F1E7"/>
+            <a:srgbClr val="FCE9F0"/>
           </a:solidFill>
           <a:ln>
             <a:noFill/>
@@ -12888,7 +12888,7 @@
             <a:r>
               <a:rPr sz="1500" b="1" i="0">
                 <a:solidFill>
-                  <a:srgbClr val="166534"/>
+                  <a:srgbClr val="A5335F"/>
                 </a:solidFill>
                 <a:latin typeface="Verdana"/>
               </a:rPr>
@@ -12999,7 +12999,7 @@
             </a:avLst>
           </a:prstGeom>
           <a:solidFill>
-            <a:srgbClr val="E3F1E7"/>
+            <a:srgbClr val="FCE9F0"/>
           </a:solidFill>
           <a:ln>
             <a:noFill/>
@@ -13056,7 +13056,7 @@
             <a:r>
               <a:rPr sz="1500" b="1" i="0">
                 <a:solidFill>
-                  <a:srgbClr val="166534"/>
+                  <a:srgbClr val="A5335F"/>
                 </a:solidFill>
                 <a:latin typeface="Verdana"/>
               </a:rPr>
@@ -13167,7 +13167,7 @@
             </a:avLst>
           </a:prstGeom>
           <a:solidFill>
-            <a:srgbClr val="E3F1E7"/>
+            <a:srgbClr val="FCE9F0"/>
           </a:solidFill>
           <a:ln>
             <a:noFill/>
@@ -13224,7 +13224,7 @@
             <a:r>
               <a:rPr sz="1500" b="1" i="0">
                 <a:solidFill>
-                  <a:srgbClr val="166534"/>
+                  <a:srgbClr val="A5335F"/>
                 </a:solidFill>
                 <a:latin typeface="Verdana"/>
               </a:rPr>
@@ -13335,7 +13335,7 @@
             </a:avLst>
           </a:prstGeom>
           <a:solidFill>
-            <a:srgbClr val="E3F1E7"/>
+            <a:srgbClr val="FCE9F0"/>
           </a:solidFill>
           <a:ln>
             <a:noFill/>
@@ -13392,7 +13392,7 @@
             <a:r>
               <a:rPr sz="1500" b="1" i="0">
                 <a:solidFill>
-                  <a:srgbClr val="166534"/>
+                  <a:srgbClr val="A5335F"/>
                 </a:solidFill>
                 <a:latin typeface="Verdana"/>
               </a:rPr>

--- a/assets/powerpoints/module-sante/E2-je-retiens-des-mots.pptx
+++ b/assets/powerpoints/module-sante/E2-je-retiens-des-mots.pptx
@@ -5045,7 +5045,7 @@
                 </a:solidFill>
                 <a:latin typeface="Verdana"/>
               </a:rPr>
-              <a:t>Les quatre points de langue sont expliqués dans l'activité, sous « En apprendre plus ».</a:t>
+              <a:t>Les quatre points de langue sont expliqués dans l'activité, sous « Ouvrir la mini-leçon ».</a:t>
             </a:r>
           </a:p>
         </p:txBody>
